--- a/lectures/1_intro.pptx
+++ b/lectures/1_intro.pptx
@@ -492,7 +492,7 @@
           <a:p>
             <a:fld id="{F20E6326-EEDE-46C7-A3B2-ADA7A3DC12DB}" type="datetimeFigureOut">
               <a:rPr lang="ru-RU" smtClean="0"/>
-              <a:t>01.09.2026</a:t>
+              <a:t>02.09.2026</a:t>
             </a:fld>
             <a:endParaRPr lang="ru-RU"/>
           </a:p>
@@ -995,7 +995,7 @@
           <a:p>
             <a:fld id="{1D8BD707-D9CF-40AE-B4C6-C98DA3205C09}" type="datetimeFigureOut">
               <a:rPr lang="en-US" smtClean="0"/>
-              <a:t>9/1/2026</a:t>
+              <a:t>9/2/2026</a:t>
             </a:fld>
             <a:endParaRPr lang="en-US"/>
           </a:p>
@@ -1193,7 +1193,7 @@
           <a:p>
             <a:fld id="{1D8BD707-D9CF-40AE-B4C6-C98DA3205C09}" type="datetimeFigureOut">
               <a:rPr lang="en-US" smtClean="0"/>
-              <a:t>9/1/2026</a:t>
+              <a:t>9/2/2026</a:t>
             </a:fld>
             <a:endParaRPr lang="en-US"/>
           </a:p>
@@ -1401,7 +1401,7 @@
           <a:p>
             <a:fld id="{1D8BD707-D9CF-40AE-B4C6-C98DA3205C09}" type="datetimeFigureOut">
               <a:rPr lang="en-US" smtClean="0"/>
-              <a:t>9/1/2026</a:t>
+              <a:t>9/2/2026</a:t>
             </a:fld>
             <a:endParaRPr lang="en-US"/>
           </a:p>
@@ -1547,7 +1547,7 @@
           <a:p>
             <a:fld id="{1D8BD707-D9CF-40AE-B4C6-C98DA3205C09}" type="datetimeFigureOut">
               <a:rPr lang="en-US"/>
-              <a:t>9/1/2026</a:t>
+              <a:t>9/2/2026</a:t>
             </a:fld>
             <a:endParaRPr lang="en-US"/>
           </a:p>
@@ -1723,7 +1723,7 @@
           <a:p>
             <a:fld id="{1D8BD707-D9CF-40AE-B4C6-C98DA3205C09}" type="datetimeFigureOut">
               <a:rPr lang="en-US" smtClean="0"/>
-              <a:t>9/1/2026</a:t>
+              <a:t>9/2/2026</a:t>
             </a:fld>
             <a:endParaRPr lang="en-US"/>
           </a:p>
@@ -1998,7 +1998,7 @@
           <a:p>
             <a:fld id="{1D8BD707-D9CF-40AE-B4C6-C98DA3205C09}" type="datetimeFigureOut">
               <a:rPr lang="en-US" smtClean="0"/>
-              <a:t>9/1/2026</a:t>
+              <a:t>9/2/2026</a:t>
             </a:fld>
             <a:endParaRPr lang="en-US"/>
           </a:p>
@@ -2263,7 +2263,7 @@
           <a:p>
             <a:fld id="{1D8BD707-D9CF-40AE-B4C6-C98DA3205C09}" type="datetimeFigureOut">
               <a:rPr lang="en-US" smtClean="0"/>
-              <a:t>9/1/2026</a:t>
+              <a:t>9/2/2026</a:t>
             </a:fld>
             <a:endParaRPr lang="en-US"/>
           </a:p>
@@ -2675,7 +2675,7 @@
           <a:p>
             <a:fld id="{1D8BD707-D9CF-40AE-B4C6-C98DA3205C09}" type="datetimeFigureOut">
               <a:rPr lang="en-US" smtClean="0"/>
-              <a:t>9/1/2026</a:t>
+              <a:t>9/2/2026</a:t>
             </a:fld>
             <a:endParaRPr lang="en-US"/>
           </a:p>
@@ -2816,7 +2816,7 @@
           <a:p>
             <a:fld id="{1D8BD707-D9CF-40AE-B4C6-C98DA3205C09}" type="datetimeFigureOut">
               <a:rPr lang="en-US" smtClean="0"/>
-              <a:t>9/1/2026</a:t>
+              <a:t>9/2/2026</a:t>
             </a:fld>
             <a:endParaRPr lang="en-US"/>
           </a:p>
@@ -2929,7 +2929,7 @@
           <a:p>
             <a:fld id="{1D8BD707-D9CF-40AE-B4C6-C98DA3205C09}" type="datetimeFigureOut">
               <a:rPr lang="en-US" smtClean="0"/>
-              <a:t>9/1/2026</a:t>
+              <a:t>9/2/2026</a:t>
             </a:fld>
             <a:endParaRPr lang="en-US"/>
           </a:p>
@@ -3240,7 +3240,7 @@
           <a:p>
             <a:fld id="{1D8BD707-D9CF-40AE-B4C6-C98DA3205C09}" type="datetimeFigureOut">
               <a:rPr lang="en-US" smtClean="0"/>
-              <a:t>9/1/2026</a:t>
+              <a:t>9/2/2026</a:t>
             </a:fld>
             <a:endParaRPr lang="en-US"/>
           </a:p>
@@ -3528,7 +3528,7 @@
           <a:p>
             <a:fld id="{1D8BD707-D9CF-40AE-B4C6-C98DA3205C09}" type="datetimeFigureOut">
               <a:rPr lang="en-US" smtClean="0"/>
-              <a:t>9/1/2026</a:t>
+              <a:t>9/2/2026</a:t>
             </a:fld>
             <a:endParaRPr lang="en-US"/>
           </a:p>
@@ -3769,7 +3769,7 @@
           <a:p>
             <a:fld id="{1D8BD707-D9CF-40AE-B4C6-C98DA3205C09}" type="datetimeFigureOut">
               <a:rPr lang="en-US" smtClean="0"/>
-              <a:t>9/1/2026</a:t>
+              <a:t>9/2/2026</a:t>
             </a:fld>
             <a:endParaRPr lang="en-US"/>
           </a:p>
@@ -4744,16 +4744,16 @@
               <a:t> </a:t>
             </a:r>
             <a:r>
-              <a:rPr lang="ru-RU" sz="1200" dirty="0">
-                <a:cs typeface="Tahoma"/>
-              </a:rPr>
-              <a:t>0</a:t>
-            </a:r>
-            <a:r>
               <a:rPr lang="ru-RU" sz="1200" dirty="0" smtClean="0">
                 <a:cs typeface="Tahoma"/>
               </a:rPr>
-              <a:t>3</a:t>
+              <a:t>0</a:t>
+            </a:r>
+            <a:r>
+              <a:rPr lang="en-US" sz="1200" dirty="0" smtClean="0">
+                <a:cs typeface="Tahoma"/>
+              </a:rPr>
+              <a:t>2</a:t>
             </a:r>
             <a:r>
               <a:rPr sz="1200" spc="-45" dirty="0" smtClean="0">
@@ -4793,6 +4793,13 @@
   <p:transition>
     <p:cut/>
   </p:transition>
+  <p:timing>
+    <p:tnLst>
+      <p:par>
+        <p:cTn id="1" dur="indefinite" restart="never" nodeType="tmRoot"/>
+      </p:par>
+    </p:tnLst>
+  </p:timing>
 </p:sld>
 </file>
 
@@ -11169,6 +11176,13 @@
   <p:transition>
     <p:cut/>
   </p:transition>
+  <p:timing>
+    <p:tnLst>
+      <p:par>
+        <p:cTn id="1" dur="indefinite" restart="never" nodeType="tmRoot"/>
+      </p:par>
+    </p:tnLst>
+  </p:timing>
 </p:sld>
 </file>
 
@@ -11858,6 +11872,13 @@
   <p:transition>
     <p:cut/>
   </p:transition>
+  <p:timing>
+    <p:tnLst>
+      <p:par>
+        <p:cTn id="1" dur="indefinite" restart="never" nodeType="tmRoot"/>
+      </p:par>
+    </p:tnLst>
+  </p:timing>
 </p:sld>
 </file>
 
@@ -12170,6 +12191,13 @@
   <p:transition>
     <p:cut/>
   </p:transition>
+  <p:timing>
+    <p:tnLst>
+      <p:par>
+        <p:cTn id="1" dur="indefinite" restart="never" nodeType="tmRoot"/>
+      </p:par>
+    </p:tnLst>
+  </p:timing>
 </p:sld>
 </file>
 
@@ -12601,6 +12629,13 @@
   <p:transition>
     <p:cut/>
   </p:transition>
+  <p:timing>
+    <p:tnLst>
+      <p:par>
+        <p:cTn id="1" dur="indefinite" restart="never" nodeType="tmRoot"/>
+      </p:par>
+    </p:tnLst>
+  </p:timing>
 </p:sld>
 </file>
 
@@ -12891,6 +12926,13 @@
   <p:transition>
     <p:cut/>
   </p:transition>
+  <p:timing>
+    <p:tnLst>
+      <p:par>
+        <p:cTn id="1" dur="indefinite" restart="never" nodeType="tmRoot"/>
+      </p:par>
+    </p:tnLst>
+  </p:timing>
 </p:sld>
 </file>
 
@@ -13269,6 +13311,13 @@
   <p:transition>
     <p:cut/>
   </p:transition>
+  <p:timing>
+    <p:tnLst>
+      <p:par>
+        <p:cTn id="1" dur="indefinite" restart="never" nodeType="tmRoot"/>
+      </p:par>
+    </p:tnLst>
+  </p:timing>
 </p:sld>
 </file>
 
@@ -13506,7 +13555,7 @@
                   </a:spcBef>
                 </a:pPr>
                 <a:r>
-                  <a:rPr lang="en-US" sz="1100" spc="-40" dirty="0">
+                  <a:rPr lang="en-US" sz="1100" spc="-40" dirty="0" smtClean="0">
                     <a:cs typeface="Tahoma"/>
                   </a:rPr>
                   <a:t>Lecturer:</a:t>
@@ -13728,19 +13777,19 @@
                   <a:rPr lang="en-US" sz="1100" spc="-5" dirty="0" smtClean="0">
                     <a:cs typeface="Tahoma"/>
                   </a:rPr>
-                  <a:t>https</a:t>
+                  <a:t>https://t.me</a:t>
                 </a:r>
                 <a:r>
                   <a:rPr lang="en-US" sz="1100" spc="-5" dirty="0">
                     <a:cs typeface="Tahoma"/>
                   </a:rPr>
-                  <a:t>://t.me/+</a:t>
+                  <a:t>/+</a:t>
                 </a:r>
                 <a:r>
-                  <a:rPr lang="en-US" sz="1100" spc="-5" dirty="0">
+                  <a:rPr lang="en-US" sz="1100" spc="-5" dirty="0" smtClean="0">
                     <a:cs typeface="Tahoma"/>
                   </a:rPr>
-                  <a:t>1raIESxtc3dlZhttps://t.me/+W6ONbAEXNpoyYzQ6WIy</a:t>
+                  <a:t>W6ONbAEXNpoyYzQ6</a:t>
                 </a:r>
                 <a:endParaRPr lang="en-US" sz="1100" dirty="0">
                   <a:cs typeface="Tahoma"/>
@@ -13815,7 +13864,7 @@
                         <a:latin typeface="Cambria Math" panose="02040503050406030204" pitchFamily="18" charset="0"/>
                         <a:cs typeface="Tahoma"/>
                       </a:rPr>
-                      <m:t>=0.1</m:t>
+                      <m:t>=0.3</m:t>
                     </m:r>
                     <m:r>
                       <a:rPr lang="en-GB" sz="900" i="1" spc="140">
@@ -13857,7 +13906,14 @@
                         <a:latin typeface="Cambria Math" panose="02040503050406030204" pitchFamily="18" charset="0"/>
                         <a:cs typeface="Tahoma"/>
                       </a:rPr>
-                      <m:t>+0.25</m:t>
+                      <m:t>+0.</m:t>
+                    </m:r>
+                    <m:r>
+                      <a:rPr lang="en-US" sz="900" b="0" i="1" spc="140" smtClean="0">
+                        <a:latin typeface="Cambria Math" panose="02040503050406030204" pitchFamily="18" charset="0"/>
+                        <a:cs typeface="Tahoma"/>
+                      </a:rPr>
+                      <m:t>35</m:t>
                     </m:r>
                     <m:r>
                       <a:rPr lang="en-GB" sz="900" i="1" spc="140">
@@ -13895,11 +13951,25 @@
                       </m:sub>
                     </m:sSub>
                     <m:r>
+                      <a:rPr lang="en-US" sz="900" b="0" i="1" spc="140" smtClean="0">
+                        <a:latin typeface="Cambria Math" panose="02040503050406030204" pitchFamily="18" charset="0"/>
+                        <a:cs typeface="Tahoma"/>
+                      </a:rPr>
+                      <m:t>+</m:t>
+                    </m:r>
+                    <m:r>
                       <a:rPr lang="en-GB" sz="900" i="1" spc="140">
                         <a:latin typeface="Cambria Math" panose="02040503050406030204" pitchFamily="18" charset="0"/>
                         <a:cs typeface="Tahoma"/>
                       </a:rPr>
-                      <m:t>+0.25</m:t>
+                      <m:t>0.</m:t>
+                    </m:r>
+                    <m:r>
+                      <a:rPr lang="en-US" sz="900" b="0" i="1" spc="140" smtClean="0">
+                        <a:latin typeface="Cambria Math" panose="02040503050406030204" pitchFamily="18" charset="0"/>
+                        <a:cs typeface="Tahoma"/>
+                      </a:rPr>
+                      <m:t>35</m:t>
                     </m:r>
                     <m:r>
                       <a:rPr lang="en-GB" sz="900" i="1" spc="140">
@@ -13928,53 +13998,11 @@
                       </m:e>
                       <m:sub>
                         <m:r>
-                          <a:rPr lang="en-GB" sz="900" i="1" spc="140">
+                          <a:rPr lang="en-US" sz="900" b="0" i="1" spc="140" smtClean="0">
                             <a:latin typeface="Cambria Math" panose="02040503050406030204" pitchFamily="18" charset="0"/>
                             <a:cs typeface="Tahoma"/>
                           </a:rPr>
                           <m:t>3</m:t>
-                        </m:r>
-                      </m:sub>
-                    </m:sSub>
-                    <m:r>
-                      <a:rPr lang="en-GB" sz="900" i="1" spc="140">
-                        <a:latin typeface="Cambria Math" panose="02040503050406030204" pitchFamily="18" charset="0"/>
-                        <a:cs typeface="Tahoma"/>
-                      </a:rPr>
-                      <m:t>+0.4</m:t>
-                    </m:r>
-                    <m:r>
-                      <a:rPr lang="en-GB" sz="900" i="1" spc="140">
-                        <a:latin typeface="Cambria Math" panose="02040503050406030204" pitchFamily="18" charset="0"/>
-                        <a:cs typeface="Tahoma"/>
-                      </a:rPr>
-                      <m:t>𝐻</m:t>
-                    </m:r>
-                    <m:sSub>
-                      <m:sSubPr>
-                        <m:ctrlPr>
-                          <a:rPr lang="en-GB" sz="900" i="1" spc="140">
-                            <a:latin typeface="Cambria Math" panose="02040503050406030204" pitchFamily="18" charset="0"/>
-                            <a:cs typeface="Tahoma"/>
-                          </a:rPr>
-                        </m:ctrlPr>
-                      </m:sSubPr>
-                      <m:e>
-                        <m:r>
-                          <a:rPr lang="en-GB" sz="900" i="1" spc="140">
-                            <a:latin typeface="Cambria Math" panose="02040503050406030204" pitchFamily="18" charset="0"/>
-                            <a:cs typeface="Tahoma"/>
-                          </a:rPr>
-                          <m:t>𝑊</m:t>
-                        </m:r>
-                      </m:e>
-                      <m:sub>
-                        <m:r>
-                          <a:rPr lang="en-GB" sz="900" i="1" spc="140">
-                            <a:latin typeface="Cambria Math" panose="02040503050406030204" pitchFamily="18" charset="0"/>
-                            <a:cs typeface="Tahoma"/>
-                          </a:rPr>
-                          <m:t>4</m:t>
                         </m:r>
                       </m:sub>
                     </m:sSub>
@@ -14770,6 +14798,13 @@
   <p:transition>
     <p:cut/>
   </p:transition>
+  <p:timing>
+    <p:tnLst>
+      <p:par>
+        <p:cTn id="1" dur="indefinite" restart="never" nodeType="tmRoot"/>
+      </p:par>
+    </p:tnLst>
+  </p:timing>
 </p:sld>
 </file>
 
@@ -15935,6 +15970,13 @@
   <p:transition>
     <p:cut/>
   </p:transition>
+  <p:timing>
+    <p:tnLst>
+      <p:par>
+        <p:cTn id="1" dur="indefinite" restart="never" nodeType="tmRoot"/>
+      </p:par>
+    </p:tnLst>
+  </p:timing>
 </p:sld>
 </file>
 
